--- a/Development_D1/Workshop/D1-W06_Apply_Workshop_L11-L12_A_Day_in_My_Life_Vlog_and_Email.pptx
+++ b/Development_D1/Workshop/D1-W06_Apply_Workshop_L11-L12_A_Day_in_My_Life_Vlog_and_Email.pptx
@@ -19616,7 +19616,7 @@
                 <a:latin typeface="Calibri" pitchFamily="34" charset="0"/>
                 <a:cs typeface="Amiri" pitchFamily="2" charset="-78"/>
               </a:rPr>
-              <a:t>STEP 9 · WRITE YOUR TEXT · ABOUT 70–90 WORDS</a:t>
+              <a:t>STEP 9 · WRITE YOUR TEXT · ABOUT 60–80 WORDS</a:t>
             </a:r>
             <a:endParaRPr lang="en-US" sz="1000" dirty="0"/>
           </a:p>
@@ -19868,7 +19868,7 @@
                 <a:latin typeface="Calibri" pitchFamily="34" charset="0"/>
                 <a:cs typeface="Amiri" pitchFamily="2" charset="-78"/>
               </a:rPr>
-              <a:t>You have a new pen-friend in Jordan. Write an email (about 70–90 words). Answer ALL four bullets: • your school-day routine, with times • what you do in the evening and why • how your weekend is different • what you did last weekend, and one change you will make. Include at least one full PREC chain.</a:t>
+              <a:t>You have a new pen-friend in Jordan. Write an email (about 60–80 words). Answer ALL four bullets: • your school-day routine, with times • what you do in the evening and why • how your weekend is different • what you did last weekend, and one change you will make. Include at least one full PREC chain.</a:t>
             </a:r>
             <a:endParaRPr lang="en-US" sz="1100" dirty="0"/>
           </a:p>
